--- a/courses/learn_clustering/module02-03-spectral-bisection/slides.pptx
+++ b/courses/learn_clustering/module02-03-spectral-bisection/slides.pptx
@@ -515,12 +515,6 @@
               <a:t>Spectral bisection uses the graph Laplacian and its Fiedler vector to propose a balanced cut. You’ll watch the order and the chosen split land on cutsize three.</a:t>
             </a:r>
           </a:p>
-          <a:p/>
-          <a:p>
-            <a:r>
-              <a:t>&lt;!-- algorithm-walkthrough --&gt;</a:t>
-            </a:r>
-          </a:p>
         </p:txBody>
       </p:sp>
       <p:sp>
@@ -939,12 +933,6 @@
           <a:p>
             <a:r>
               <a:t>Spectral is a strong initializer for bipartition. On larger chips it pairs with multilevel; here the tiny instance is exact enough to grade against goldens.</a:t>
-            </a:r>
-          </a:p>
-          <a:p/>
-          <a:p>
-            <a:r>
-              <a:t>&lt;!-- /algorithm-walkthrough --&gt;</a:t>
             </a:r>
           </a:p>
         </p:txBody>
@@ -5815,7 +5803,7 @@
                 <a:spcPts val="2200"/>
               </a:lnSpc>
               <a:spcAft>
-                <a:spcPts val="600"/>
+                <a:spcPts val="400"/>
               </a:spcAft>
             </a:pPr>
             <a:r>
@@ -5834,26 +5822,7 @@
                 <a:spcPts val="2200"/>
               </a:lnSpc>
               <a:spcAft>
-                <a:spcPts val="600"/>
-              </a:spcAft>
-            </a:pPr>
-            <a:r>
-              <a:rPr sz="2000" b="0">
-                <a:solidFill>
-                  <a:srgbClr val="333333"/>
-                </a:solidFill>
-                <a:latin typeface="Consolas"/>
-              </a:rPr>
-              <a:t/>
-            </a:r>
-          </a:p>
-          <a:p>
-            <a:pPr>
-              <a:lnSpc>
-                <a:spcPts val="2200"/>
-              </a:lnSpc>
-              <a:spcAft>
-                <a:spcPts val="600"/>
+                <a:spcPts val="400"/>
               </a:spcAft>
             </a:pPr>
             <a:r>
